--- a/slides/week06/ch07_raptor_fare.pptx
+++ b/slides/week06/ch07_raptor_fare.pptx
@@ -27,6 +27,7 @@
     <p:sldId id="275" r:id="rId26"/>
     <p:sldId id="276" r:id="rId27"/>
     <p:sldId id="277" r:id="rId28"/>
+    <p:sldId id="278" r:id="rId29"/>
   </p:sldIdLst>
   <p:notesMasterIdLst>
     <p:notesMasterId r:id="rId15"/>
@@ -592,7 +593,7 @@
           <a:lstStyle/>
           <a:p>
             <a:r>
-              <a:t>숫자에서 정책으로 넘어가는 지점이다. 학생들에게 어느 쪽을 택할지 먼저 말하게 하고 근거를 요구한다.</a:t>
+              <a:t>어디를 가든 걷는 시간과 기다리는 시간은 비슷하다는 뜻이다.</a:t>
             </a:r>
           </a:p>
         </p:txBody>
@@ -662,7 +663,7 @@
           <a:lstStyle/>
           <a:p>
             <a:r>
-              <a:t>요금이 환승을 억제하지 않는다는 뜻이다. 그런데도 사람들이 환승을 꺼리는 이유는 시간과 불편이다. 실제 엔진은 이것을 환승 저항으로 비용에 반영한다.</a:t>
+              <a:t>숫자에서 정책으로 넘어가는 지점이다. 학생들에게 어느 쪽을 택할지 먼저 말하게 하고 근거를 요구한다.</a:t>
             </a:r>
           </a:p>
         </p:txBody>
@@ -732,7 +733,7 @@
           <a:lstStyle/>
           <a:p>
             <a:r>
-              <a:t>정확히 같은 값을 요구하지 않는다. 얼마나 다른지와 그 차이를 설명할 수 있는지가 채점 기준이다.</a:t>
+              <a:t>요금이 환승을 억제하지 않는다는 뜻이다. 그런데도 사람들이 환승을 꺼리는 이유는 시간과 불편이다. 실제 엔진은 이것을 환승 저항으로 비용에 반영한다.</a:t>
             </a:r>
           </a:p>
         </p:txBody>
@@ -802,7 +803,7 @@
           <a:lstStyle/>
           <a:p>
             <a:r>
-              <a:t>평균 65분과 중앙값 56분의 차이가 오늘의 결론이다. 8장에서는 한 사람의 경로가 아니라 수천 명의 수요를 만든다.</a:t>
+              <a:t>정확히 같은 값을 요구하지 않는다. 얼마나 다른지와 그 차이를 설명할 수 있는지가 채점 기준이다.</a:t>
             </a:r>
           </a:p>
         </p:txBody>
@@ -872,6 +873,76 @@
           <a:lstStyle/>
           <a:p>
             <a:r>
+              <a:t>평균 65분과 중앙값 56분의 차이가 오늘의 결론이다. 8장에서는 한 사람의 경로가 아니라 수천 명의 수요를 만든다.</a:t>
+            </a:r>
+          </a:p>
+        </p:txBody>
+      </p:sp>
+      <p:sp>
+        <p:nvSpPr>
+          <p:cNvPr id="4" name="Slide Number Placeholder 3"/>
+          <p:cNvSpPr>
+            <a:spLocks noGrp="1"/>
+          </p:cNvSpPr>
+          <p:nvPr>
+            <p:ph type="sldNum" idx="5" sz="quarter"/>
+          </p:nvPr>
+        </p:nvSpPr>
+        <p:spPr/>
+      </p:sp>
+    </p:spTree>
+  </p:cSld>
+  <p:clrMapOvr>
+    <a:masterClrMapping/>
+  </p:clrMapOvr>
+</p:notes>
+</file>
+
+<file path=ppt/notesSlides/notesSlide15.xml><?xml version="1.0" encoding="utf-8"?>
+<p:notes xmlns:a="http://schemas.openxmlformats.org/drawingml/2006/main" xmlns:p="http://schemas.openxmlformats.org/presentationml/2006/main" xmlns:r="http://schemas.openxmlformats.org/officeDocument/2006/relationships">
+  <p:cSld>
+    <p:spTree>
+      <p:nvGrpSpPr>
+        <p:cNvPr id="1" name=""/>
+        <p:cNvGrpSpPr/>
+        <p:nvPr/>
+      </p:nvGrpSpPr>
+      <p:grpSpPr>
+        <a:xfrm>
+          <a:off x="0" y="0"/>
+          <a:ext cx="0" cy="0"/>
+          <a:chOff x="0" y="0"/>
+          <a:chExt cx="0" cy="0"/>
+        </a:xfrm>
+      </p:grpSpPr>
+      <p:sp>
+        <p:nvSpPr>
+          <p:cNvPr id="2" name="Slide Image Placeholder 1"/>
+          <p:cNvSpPr>
+            <a:spLocks noGrp="1"/>
+          </p:cNvSpPr>
+          <p:nvPr>
+            <p:ph type="sldImg" idx="2"/>
+          </p:nvPr>
+        </p:nvSpPr>
+        <p:spPr/>
+      </p:sp>
+      <p:sp>
+        <p:nvSpPr>
+          <p:cNvPr id="3" name="Notes Placeholder 2"/>
+          <p:cNvSpPr>
+            <a:spLocks noGrp="1"/>
+          </p:cNvSpPr>
+          <p:nvPr>
+            <p:ph type="body" idx="3" sz="quarter"/>
+          </p:nvPr>
+        </p:nvSpPr>
+        <p:spPr/>
+        <p:txBody>
+          <a:bodyPr/>
+          <a:lstStyle/>
+          <a:p>
+            <a:r>
               <a:t>HW2가 이번 주 마감이다. 직접 구현한 RAPTOR와 참조 결과의 대조표를 제출한다. 기말 팀 프로젝트도 이번 주에 시작하므로 팀 구성과 시나리오 배정을 진행한다.</a:t>
             </a:r>
           </a:p>
@@ -1082,7 +1153,7 @@
           <a:lstStyle/>
           <a:p>
             <a:r>
-              <a:t>값을 임의로 두는 것보다 측정하고 두는 편이 낫다. 파일럿 프로젝트에서 대상지를 정한 뒤 이 실험을 먼저 한다.</a:t>
+              <a:t>슬라이드는 개요만 다룬다. 세부 내용과 코드는 교재 원고와 실습 노트북에서 확인한다. 교재 저장소는 비공개이므로 초대받은 계정으로 로그인한 상태여야 주소가 열린다.</a:t>
             </a:r>
           </a:p>
         </p:txBody>
@@ -1152,7 +1223,7 @@
           <a:lstStyle/>
           <a:p>
             <a:r>
-              <a:t>우리 도보 환승은 직선거리 기반이라 강이나 철길로 막힌 두 정류장에도 환승이 생성된다. 이 오류는 거리를 늘릴수록 심해진다. 거리를 늘리려면 보행 네트워크로 실제 경로를 확인해야 한다.</a:t>
+              <a:t>값을 임의로 두는 것보다 측정하고 두는 편이 낫다. 파일럿 프로젝트에서 대상지를 정한 뒤 이 실험을 먼저 한다.</a:t>
             </a:r>
           </a:p>
         </p:txBody>
@@ -1222,7 +1293,7 @@
           <a:lstStyle/>
           <a:p>
             <a:r>
-              <a:t>타는 횟수 곱하기 기본요금이 아니다. 버스에서 지하철로 갈아타도 1,550원 한 번만 낸다. 이것이 통합요금의 요점이다.</a:t>
+              <a:t>우리 도보 환승은 직선거리 기반이라 강이나 철길로 막힌 두 정류장에도 환승이 생성된다. 이 오류는 거리를 늘릴수록 심해진다. 거리를 늘리려면 보행 네트워크로 실제 경로를 확인해야 한다.</a:t>
             </a:r>
           </a:p>
         </p:txBody>
@@ -1292,7 +1363,7 @@
           <a:lstStyle/>
           <a:p>
             <a:r>
-              <a:t>6장에서 구한 하남시청에서 미사역까지의 통행은 3.4 km라 기본요금 1,550원이다. 버스와 지하철을 둘 다 탔지만 한 번만 낸다. 이 구현은 성인 카드 기준이고 광역버스 할증, 심야 할증, 연령 할인, 30분 환승 제한을 포함하지 않는다.</a:t>
+              <a:t>타는 횟수 곱하기 기본요금이 아니다. 버스에서 지하철로 갈아타도 1,550원 한 번만 낸다. 이것이 통합요금의 요점이다.</a:t>
             </a:r>
           </a:p>
         </p:txBody>
@@ -1362,7 +1433,7 @@
           <a:lstStyle/>
           <a:p>
             <a:r>
-              <a:t>분포를 확인하지 않고 평균만 보고했다면 하남시 평균 통행시간 65분이라는 틀린 결론을 냈을 것이다. 1장에서 확인한 41분 승객과 같은 구조의 문제다.</a:t>
+              <a:t>6장에서 구한 하남시청에서 미사역까지의 통행은 3.4 km라 기본요금 1,550원이다. 버스와 지하철을 둘 다 탔지만 한 번만 낸다. 이 구현은 성인 카드 기준이고 광역버스 할증, 심야 할증, 연령 할인, 30분 환승 제한을 포함하지 않는다.</a:t>
             </a:r>
           </a:p>
         </p:txBody>
@@ -1432,7 +1503,7 @@
           <a:lstStyle/>
           <a:p>
             <a:r>
-              <a:t>어디를 가든 걷는 시간과 기다리는 시간은 비슷하다는 뜻이다.</a:t>
+              <a:t>분포를 확인하지 않고 평균만 보고했다면 하남시 평균 통행시간 65분이라는 틀린 결론을 냈을 것이다. 1장에서 확인한 41분 승객과 같은 구조의 문제다.</a:t>
             </a:r>
           </a:p>
         </p:txBody>
@@ -5067,6 +5138,118 @@
       <p:grpSpPr/>
       <p:sp>
         <p:nvSpPr>
+          <p:cNvPr id="2" name="Text Placeholder 1"/>
+          <p:cNvSpPr>
+            <a:spLocks noGrp="1"/>
+          </p:cNvSpPr>
+          <p:nvPr>
+            <p:ph type="body" idx="100"/>
+          </p:nvPr>
+        </p:nvSpPr>
+        <p:spPr/>
+        <p:txBody>
+          <a:bodyPr/>
+          <a:lstStyle/>
+          <a:p>
+            <a:r>
+              <a:t>03</a:t>
+            </a:r>
+          </a:p>
+        </p:txBody>
+      </p:sp>
+      <p:sp>
+        <p:nvSpPr>
+          <p:cNvPr id="3" name="Title 2"/>
+          <p:cNvSpPr>
+            <a:spLocks noGrp="1"/>
+          </p:cNvSpPr>
+          <p:nvPr>
+            <p:ph type="title" idx="101"/>
+          </p:nvPr>
+        </p:nvSpPr>
+        <p:spPr/>
+        <p:txBody>
+          <a:bodyPr/>
+          <a:lstStyle/>
+          <a:p>
+            <a:r>
+              <a:t>교재 7.3 통합환승요금</a:t>
+            </a:r>
+          </a:p>
+        </p:txBody>
+      </p:sp>
+      <p:sp>
+        <p:nvSpPr>
+          <p:cNvPr id="4" name="Text Placeholder 3"/>
+          <p:cNvSpPr>
+            <a:spLocks noGrp="1"/>
+          </p:cNvSpPr>
+          <p:nvPr>
+            <p:ph type="body" idx="102"/>
+          </p:nvPr>
+        </p:nvSpPr>
+        <p:spPr/>
+        <p:txBody>
+          <a:bodyPr/>
+          <a:lstStyle/>
+          <a:p>
+            <a:pPr>
+              <a:spcAft>
+                <a:spcPts val="1000"/>
+              </a:spcAft>
+            </a:pPr>
+            <a:r>
+              <a:rPr>
+                <a:solidFill>
+                  <a:srgbClr val="AFAFAF"/>
+                </a:solidFill>
+              </a:rPr>
+              <a:t>3.1  </a:t>
+            </a:r>
+            <a:r>
+              <a:t>세 줄 규칙</a:t>
+            </a:r>
+          </a:p>
+          <a:p>
+            <a:pPr>
+              <a:spcAft>
+                <a:spcPts val="1000"/>
+              </a:spcAft>
+            </a:pPr>
+            <a:r>
+              <a:rPr>
+                <a:solidFill>
+                  <a:srgbClr val="AFAFAF"/>
+                </a:solidFill>
+              </a:rPr>
+              <a:t>3.2  </a:t>
+            </a:r>
+            <a:r>
+              <a:t>손 검산</a:t>
+            </a:r>
+          </a:p>
+        </p:txBody>
+      </p:sp>
+    </p:spTree>
+  </p:cSld>
+  <p:clrMapOvr>
+    <a:masterClrMapping/>
+  </p:clrMapOvr>
+</p:sld>
+</file>
+
+<file path=ppt/slides/slide11.xml><?xml version="1.0" encoding="utf-8"?>
+<p:sld xmlns:a="http://schemas.openxmlformats.org/drawingml/2006/main" xmlns:p="http://schemas.openxmlformats.org/presentationml/2006/main" xmlns:r="http://schemas.openxmlformats.org/officeDocument/2006/relationships">
+  <p:cSld>
+    <p:spTree>
+      <p:nvGrpSpPr>
+        <p:cNvPr id="1" name=""/>
+        <p:cNvGrpSpPr/>
+        <p:nvPr/>
+      </p:nvGrpSpPr>
+      <p:grpSpPr/>
+      <p:sp>
+        <p:nvSpPr>
           <p:cNvPr id="2" name="Title 1"/>
           <p:cNvSpPr>
             <a:spLocks noGrp="1"/>
@@ -5157,7 +5340,7 @@
           <a:lstStyle/>
           <a:p>
             <a:r>
-              <a:t>표 2. 수단별 기본요금과 거리 초과 요금</a:t>
+              <a:t>표 3. 수단별 기본요금과 거리 초과 요금</a:t>
             </a:r>
           </a:p>
         </p:txBody>
@@ -5679,7 +5862,7 @@
 </p:sld>
 </file>
 
-<file path=ppt/slides/slide11.xml><?xml version="1.0" encoding="utf-8"?>
+<file path=ppt/slides/slide12.xml><?xml version="1.0" encoding="utf-8"?>
 <p:sld xmlns:a="http://schemas.openxmlformats.org/drawingml/2006/main" xmlns:p="http://schemas.openxmlformats.org/presentationml/2006/main" xmlns:r="http://schemas.openxmlformats.org/officeDocument/2006/relationships">
   <p:cSld>
     <p:spTree>
@@ -5822,136 +6005,6 @@
               <a:t>1004</a:t>
             </a:fld>
             <a:endParaRPr lang="en-US"/>
-          </a:p>
-        </p:txBody>
-      </p:sp>
-    </p:spTree>
-  </p:cSld>
-  <p:clrMapOvr>
-    <a:masterClrMapping/>
-  </p:clrMapOvr>
-</p:sld>
-</file>
-
-<file path=ppt/slides/slide12.xml><?xml version="1.0" encoding="utf-8"?>
-<p:sld xmlns:a="http://schemas.openxmlformats.org/drawingml/2006/main" xmlns:p="http://schemas.openxmlformats.org/presentationml/2006/main" xmlns:r="http://schemas.openxmlformats.org/officeDocument/2006/relationships">
-  <p:cSld>
-    <p:spTree>
-      <p:nvGrpSpPr>
-        <p:cNvPr id="1" name=""/>
-        <p:cNvGrpSpPr/>
-        <p:nvPr/>
-      </p:nvGrpSpPr>
-      <p:grpSpPr/>
-      <p:sp>
-        <p:nvSpPr>
-          <p:cNvPr id="2" name="Text Placeholder 1"/>
-          <p:cNvSpPr>
-            <a:spLocks noGrp="1"/>
-          </p:cNvSpPr>
-          <p:nvPr>
-            <p:ph type="body" idx="100"/>
-          </p:nvPr>
-        </p:nvSpPr>
-        <p:spPr/>
-        <p:txBody>
-          <a:bodyPr/>
-          <a:lstStyle/>
-          <a:p>
-            <a:r>
-              <a:t>04</a:t>
-            </a:r>
-          </a:p>
-        </p:txBody>
-      </p:sp>
-      <p:sp>
-        <p:nvSpPr>
-          <p:cNvPr id="3" name="Title 2"/>
-          <p:cNvSpPr>
-            <a:spLocks noGrp="1"/>
-          </p:cNvSpPr>
-          <p:nvPr>
-            <p:ph type="title" idx="101"/>
-          </p:nvPr>
-        </p:nvSpPr>
-        <p:spPr/>
-        <p:txBody>
-          <a:bodyPr/>
-          <a:lstStyle/>
-          <a:p>
-            <a:r>
-              <a:t>교재 7.4–7.5 지표 분포</a:t>
-            </a:r>
-          </a:p>
-        </p:txBody>
-      </p:sp>
-      <p:sp>
-        <p:nvSpPr>
-          <p:cNvPr id="4" name="Text Placeholder 3"/>
-          <p:cNvSpPr>
-            <a:spLocks noGrp="1"/>
-          </p:cNvSpPr>
-          <p:nvPr>
-            <p:ph type="body" idx="102"/>
-          </p:nvPr>
-        </p:nvSpPr>
-        <p:spPr/>
-        <p:txBody>
-          <a:bodyPr/>
-          <a:lstStyle/>
-          <a:p>
-            <a:pPr>
-              <a:spcAft>
-                <a:spcPts val="1000"/>
-              </a:spcAft>
-            </a:pPr>
-            <a:r>
-              <a:rPr>
-                <a:solidFill>
-                  <a:srgbClr val="AFAFAF"/>
-                </a:solidFill>
-              </a:rPr>
-              <a:t>4.1  </a:t>
-            </a:r>
-            <a:r>
-              <a:t>평균과 중앙값의 차이</a:t>
-            </a:r>
-          </a:p>
-          <a:p>
-            <a:pPr>
-              <a:spcAft>
-                <a:spcPts val="1000"/>
-              </a:spcAft>
-            </a:pPr>
-            <a:r>
-              <a:rPr>
-                <a:solidFill>
-                  <a:srgbClr val="AFAFAF"/>
-                </a:solidFill>
-              </a:rPr>
-              <a:t>4.2  </a:t>
-            </a:r>
-            <a:r>
-              <a:t>시간 구성</a:t>
-            </a:r>
-          </a:p>
-          <a:p>
-            <a:pPr>
-              <a:spcAft>
-                <a:spcPts val="1000"/>
-              </a:spcAft>
-            </a:pPr>
-            <a:r>
-              <a:rPr>
-                <a:solidFill>
-                  <a:srgbClr val="AFAFAF"/>
-                </a:solidFill>
-              </a:rPr>
-              <a:t>4.3  </a:t>
-            </a:r>
-            <a:r>
-              <a:t>개선 방향의 근거</a:t>
-            </a:r>
           </a:p>
         </p:txBody>
       </p:sp>
@@ -5975,6 +6028,136 @@
       <p:grpSpPr/>
       <p:sp>
         <p:nvSpPr>
+          <p:cNvPr id="2" name="Text Placeholder 1"/>
+          <p:cNvSpPr>
+            <a:spLocks noGrp="1"/>
+          </p:cNvSpPr>
+          <p:nvPr>
+            <p:ph type="body" idx="100"/>
+          </p:nvPr>
+        </p:nvSpPr>
+        <p:spPr/>
+        <p:txBody>
+          <a:bodyPr/>
+          <a:lstStyle/>
+          <a:p>
+            <a:r>
+              <a:t>04</a:t>
+            </a:r>
+          </a:p>
+        </p:txBody>
+      </p:sp>
+      <p:sp>
+        <p:nvSpPr>
+          <p:cNvPr id="3" name="Title 2"/>
+          <p:cNvSpPr>
+            <a:spLocks noGrp="1"/>
+          </p:cNvSpPr>
+          <p:nvPr>
+            <p:ph type="title" idx="101"/>
+          </p:nvPr>
+        </p:nvSpPr>
+        <p:spPr/>
+        <p:txBody>
+          <a:bodyPr/>
+          <a:lstStyle/>
+          <a:p>
+            <a:r>
+              <a:t>교재 7.4–7.5 지표 분포</a:t>
+            </a:r>
+          </a:p>
+        </p:txBody>
+      </p:sp>
+      <p:sp>
+        <p:nvSpPr>
+          <p:cNvPr id="4" name="Text Placeholder 3"/>
+          <p:cNvSpPr>
+            <a:spLocks noGrp="1"/>
+          </p:cNvSpPr>
+          <p:nvPr>
+            <p:ph type="body" idx="102"/>
+          </p:nvPr>
+        </p:nvSpPr>
+        <p:spPr/>
+        <p:txBody>
+          <a:bodyPr/>
+          <a:lstStyle/>
+          <a:p>
+            <a:pPr>
+              <a:spcAft>
+                <a:spcPts val="1000"/>
+              </a:spcAft>
+            </a:pPr>
+            <a:r>
+              <a:rPr>
+                <a:solidFill>
+                  <a:srgbClr val="AFAFAF"/>
+                </a:solidFill>
+              </a:rPr>
+              <a:t>4.1  </a:t>
+            </a:r>
+            <a:r>
+              <a:t>평균과 중앙값의 차이</a:t>
+            </a:r>
+          </a:p>
+          <a:p>
+            <a:pPr>
+              <a:spcAft>
+                <a:spcPts val="1000"/>
+              </a:spcAft>
+            </a:pPr>
+            <a:r>
+              <a:rPr>
+                <a:solidFill>
+                  <a:srgbClr val="AFAFAF"/>
+                </a:solidFill>
+              </a:rPr>
+              <a:t>4.2  </a:t>
+            </a:r>
+            <a:r>
+              <a:t>시간 구성</a:t>
+            </a:r>
+          </a:p>
+          <a:p>
+            <a:pPr>
+              <a:spcAft>
+                <a:spcPts val="1000"/>
+              </a:spcAft>
+            </a:pPr>
+            <a:r>
+              <a:rPr>
+                <a:solidFill>
+                  <a:srgbClr val="AFAFAF"/>
+                </a:solidFill>
+              </a:rPr>
+              <a:t>4.3  </a:t>
+            </a:r>
+            <a:r>
+              <a:t>개선 방향의 근거</a:t>
+            </a:r>
+          </a:p>
+        </p:txBody>
+      </p:sp>
+    </p:spTree>
+  </p:cSld>
+  <p:clrMapOvr>
+    <a:masterClrMapping/>
+  </p:clrMapOvr>
+</p:sld>
+</file>
+
+<file path=ppt/slides/slide14.xml><?xml version="1.0" encoding="utf-8"?>
+<p:sld xmlns:a="http://schemas.openxmlformats.org/drawingml/2006/main" xmlns:p="http://schemas.openxmlformats.org/presentationml/2006/main" xmlns:r="http://schemas.openxmlformats.org/officeDocument/2006/relationships">
+  <p:cSld>
+    <p:spTree>
+      <p:nvGrpSpPr>
+        <p:cNvPr id="1" name=""/>
+        <p:cNvGrpSpPr/>
+        <p:nvPr/>
+      </p:nvGrpSpPr>
+      <p:grpSpPr/>
+      <p:sp>
+        <p:nvSpPr>
           <p:cNvPr id="2" name="Title 1"/>
           <p:cNvSpPr>
             <a:spLocks noGrp="1"/>
@@ -6071,7 +6254,7 @@
           <a:lstStyle/>
           <a:p>
             <a:r>
-              <a:t>표 3. 도달 가능한 정류장 300개 표본의 통행시간</a:t>
+              <a:t>표 4. 도달 가능한 정류장 300개 표본의 통행시간</a:t>
             </a:r>
           </a:p>
         </p:txBody>
@@ -6524,7 +6707,7 @@
 </p:sld>
 </file>
 
-<file path=ppt/slides/slide14.xml><?xml version="1.0" encoding="utf-8"?>
+<file path=ppt/slides/slide15.xml><?xml version="1.0" encoding="utf-8"?>
 <p:sld xmlns:a="http://schemas.openxmlformats.org/drawingml/2006/main" xmlns:p="http://schemas.openxmlformats.org/presentationml/2006/main" xmlns:r="http://schemas.openxmlformats.org/officeDocument/2006/relationships">
   <p:cSld>
     <p:spTree>
@@ -6711,7 +6894,7 @@
 </p:sld>
 </file>
 
-<file path=ppt/slides/slide15.xml><?xml version="1.0" encoding="utf-8"?>
+<file path=ppt/slides/slide16.xml><?xml version="1.0" encoding="utf-8"?>
 <p:sld xmlns:a="http://schemas.openxmlformats.org/drawingml/2006/main" xmlns:p="http://schemas.openxmlformats.org/presentationml/2006/main" xmlns:r="http://schemas.openxmlformats.org/officeDocument/2006/relationships">
   <p:cSld>
     <p:spTree>
@@ -6848,118 +7031,6 @@
               <a:t>1004</a:t>
             </a:fld>
             <a:endParaRPr lang="en-US"/>
-          </a:p>
-        </p:txBody>
-      </p:sp>
-    </p:spTree>
-  </p:cSld>
-  <p:clrMapOvr>
-    <a:masterClrMapping/>
-  </p:clrMapOvr>
-</p:sld>
-</file>
-
-<file path=ppt/slides/slide16.xml><?xml version="1.0" encoding="utf-8"?>
-<p:sld xmlns:a="http://schemas.openxmlformats.org/drawingml/2006/main" xmlns:p="http://schemas.openxmlformats.org/presentationml/2006/main" xmlns:r="http://schemas.openxmlformats.org/officeDocument/2006/relationships">
-  <p:cSld>
-    <p:spTree>
-      <p:nvGrpSpPr>
-        <p:cNvPr id="1" name=""/>
-        <p:cNvGrpSpPr/>
-        <p:nvPr/>
-      </p:nvGrpSpPr>
-      <p:grpSpPr/>
-      <p:sp>
-        <p:nvSpPr>
-          <p:cNvPr id="2" name="Text Placeholder 1"/>
-          <p:cNvSpPr>
-            <a:spLocks noGrp="1"/>
-          </p:cNvSpPr>
-          <p:nvPr>
-            <p:ph type="body" idx="100"/>
-          </p:nvPr>
-        </p:nvSpPr>
-        <p:spPr/>
-        <p:txBody>
-          <a:bodyPr/>
-          <a:lstStyle/>
-          <a:p>
-            <a:r>
-              <a:t>05</a:t>
-            </a:r>
-          </a:p>
-        </p:txBody>
-      </p:sp>
-      <p:sp>
-        <p:nvSpPr>
-          <p:cNvPr id="3" name="Title 2"/>
-          <p:cNvSpPr>
-            <a:spLocks noGrp="1"/>
-          </p:cNvSpPr>
-          <p:nvPr>
-            <p:ph type="title" idx="101"/>
-          </p:nvPr>
-        </p:nvSpPr>
-        <p:spPr/>
-        <p:txBody>
-          <a:bodyPr/>
-          <a:lstStyle/>
-          <a:p>
-            <a:r>
-              <a:t>교재 7.6–7.7 환승·요금과 엔진 대조</a:t>
-            </a:r>
-          </a:p>
-        </p:txBody>
-      </p:sp>
-      <p:sp>
-        <p:nvSpPr>
-          <p:cNvPr id="4" name="Text Placeholder 3"/>
-          <p:cNvSpPr>
-            <a:spLocks noGrp="1"/>
-          </p:cNvSpPr>
-          <p:nvPr>
-            <p:ph type="body" idx="102"/>
-          </p:nvPr>
-        </p:nvSpPr>
-        <p:spPr/>
-        <p:txBody>
-          <a:bodyPr/>
-          <a:lstStyle/>
-          <a:p>
-            <a:pPr>
-              <a:spcAft>
-                <a:spcPts val="1000"/>
-              </a:spcAft>
-            </a:pPr>
-            <a:r>
-              <a:rPr>
-                <a:solidFill>
-                  <a:srgbClr val="AFAFAF"/>
-                </a:solidFill>
-              </a:rPr>
-              <a:t>5.1  </a:t>
-            </a:r>
-            <a:r>
-              <a:t>환승 횟수와 요금의 관계</a:t>
-            </a:r>
-          </a:p>
-          <a:p>
-            <a:pPr>
-              <a:spcAft>
-                <a:spcPts val="1000"/>
-              </a:spcAft>
-            </a:pPr>
-            <a:r>
-              <a:rPr>
-                <a:solidFill>
-                  <a:srgbClr val="AFAFAF"/>
-                </a:solidFill>
-              </a:rPr>
-              <a:t>5.2  </a:t>
-            </a:r>
-            <a:r>
-              <a:t>실제 엔진과의 대조</a:t>
-            </a:r>
           </a:p>
         </p:txBody>
       </p:sp>
@@ -6983,12 +7054,12 @@
       <p:grpSpPr/>
       <p:sp>
         <p:nvSpPr>
-          <p:cNvPr id="2" name="Title 1"/>
-          <p:cNvSpPr>
-            <a:spLocks noGrp="1"/>
-          </p:cNvSpPr>
-          <p:nvPr>
-            <p:ph type="title" idx="100"/>
+          <p:cNvPr id="2" name="Text Placeholder 1"/>
+          <p:cNvSpPr>
+            <a:spLocks noGrp="1"/>
+          </p:cNvSpPr>
+          <p:nvPr>
+            <p:ph type="body" idx="100"/>
           </p:nvPr>
         </p:nvSpPr>
         <p:spPr/>
@@ -6997,19 +7068,19 @@
           <a:lstStyle/>
           <a:p>
             <a:r>
-              <a:t>5.1 환승 횟수와 요금의 관계</a:t>
-            </a:r>
-          </a:p>
-        </p:txBody>
-      </p:sp>
-      <p:sp>
-        <p:nvSpPr>
-          <p:cNvPr id="3" name="Text Placeholder 2"/>
-          <p:cNvSpPr>
-            <a:spLocks noGrp="1"/>
-          </p:cNvSpPr>
-          <p:nvPr>
-            <p:ph type="body" idx="101"/>
+              <a:t>05</a:t>
+            </a:r>
+          </a:p>
+        </p:txBody>
+      </p:sp>
+      <p:sp>
+        <p:nvSpPr>
+          <p:cNvPr id="3" name="Title 2"/>
+          <p:cNvSpPr>
+            <a:spLocks noGrp="1"/>
+          </p:cNvSpPr>
+          <p:nvPr>
+            <p:ph type="title" idx="101"/>
           </p:nvPr>
         </p:nvSpPr>
         <p:spPr/>
@@ -7018,7 +7089,7 @@
           <a:lstStyle/>
           <a:p>
             <a:r>
-              <a:t>5. 교재 7.6–7.7 환승·요금과 엔진 대조</a:t>
+              <a:t>교재 7.6–7.7 환승·요금과 엔진 대조</a:t>
             </a:r>
           </a:p>
         </p:txBody>
@@ -7038,76 +7109,40 @@
           <a:bodyPr/>
           <a:lstStyle/>
           <a:p>
-            <a:pPr/>
-            <a:r>
-              <a:t>300개 표본 중 환승 0회는 24개 — 대부분 1회에서 3회</a:t>
-            </a:r>
-          </a:p>
-          <a:p>
-            <a:pPr/>
-            <a:r>
-              <a:t>환승 증가 시 통행시간은 증가</a:t>
-            </a:r>
-          </a:p>
-          <a:p>
-            <a:pPr/>
-            <a:r>
-              <a:t>환승 증가에도 요금은 거의 불변</a:t>
-            </a:r>
-          </a:p>
-          <a:p>
-            <a:pPr/>
-            <a:r>
-              <a:t>이유: 통합요금은 횟수가 아니라 거리에만 반응</a:t>
-            </a:r>
-          </a:p>
-        </p:txBody>
-      </p:sp>
-      <p:sp>
-        <p:nvSpPr>
-          <p:cNvPr id="25" name="Slide Number Placeholder 0"/>
-          <p:cNvSpPr>
-            <a:spLocks noGrp="1"/>
-          </p:cNvSpPr>
-          <p:nvPr>
-            <p:ph type="sldNum" sz="quarter" idx="4294967295"/>
-          </p:nvPr>
-        </p:nvSpPr>
-        <p:spPr>
-          <a:xfrm>
-            <a:off x="10591495" y="6355080"/>
-            <a:ext cx="914400" cy="274320"/>
-          </a:xfrm>
-          <a:prstGeom prst="rect">
-            <a:avLst/>
-          </a:prstGeom>
-          <a:extLst>
-            <a:ext uri="{C572A759-6A51-4108-AA02-DFA0A04FC94B}">
-              <ma14:wrappingTextBoxFlag xmlns:ma14="http://schemas.microsoft.com/office/mac/drawingml/2011/main" val="0"/>
-            </a:ext>
-          </a:extLst>
-        </p:spPr>
-        <p:txBody>
-          <a:bodyPr/>
-          <a:lstStyle>
-            <a:lvl1pPr>
-              <a:defRPr sz="1000">
+            <a:pPr>
+              <a:spcAft>
+                <a:spcPts val="1000"/>
+              </a:spcAft>
+            </a:pPr>
+            <a:r>
+              <a:rPr>
                 <a:solidFill>
                   <a:srgbClr val="AFAFAF"/>
                 </a:solidFill>
-                <a:latin typeface="Pretendard Medium"/>
-                <a:ea typeface="Pretendard Medium"/>
-                <a:cs typeface="Pretendard Medium"/>
-              </a:defRPr>
-            </a:lvl1pPr>
-          </a:lstStyle>
-          <a:p>
-            <a:pPr algn="r"/>
-            <a:fld id="{F7021451-1387-4CA6-816F-3879F97B5CBC}" type="slidenum">
-              <a:rPr b="0" lang="en-US"/>
-              <a:t>1004</a:t>
-            </a:fld>
-            <a:endParaRPr lang="en-US"/>
+              </a:rPr>
+              <a:t>5.1  </a:t>
+            </a:r>
+            <a:r>
+              <a:t>환승 횟수와 요금의 관계</a:t>
+            </a:r>
+          </a:p>
+          <a:p>
+            <a:pPr>
+              <a:spcAft>
+                <a:spcPts val="1000"/>
+              </a:spcAft>
+            </a:pPr>
+            <a:r>
+              <a:rPr>
+                <a:solidFill>
+                  <a:srgbClr val="AFAFAF"/>
+                </a:solidFill>
+              </a:rPr>
+              <a:t>5.2  </a:t>
+            </a:r>
+            <a:r>
+              <a:t>실제 엔진과의 대조</a:t>
+            </a:r>
           </a:p>
         </p:txBody>
       </p:sp>
@@ -7145,7 +7180,7 @@
           <a:lstStyle/>
           <a:p>
             <a:r>
-              <a:t>5.2 실제 엔진과의 대조</a:t>
+              <a:t>5.1 환승 횟수와 요금의 관계</a:t>
             </a:r>
           </a:p>
         </p:txBody>
@@ -7188,37 +7223,25 @@
           <a:p>
             <a:pPr/>
             <a:r>
-              <a:t>서버가 있으면 우리 RAPTOR와 엔진 결과를 나란히 비교</a:t>
+              <a:t>300개 표본 중 환승 0회는 24개 — 대부분 1회에서 3회</a:t>
             </a:r>
           </a:p>
           <a:p>
             <a:pPr/>
             <a:r>
-              <a:t>차이의 원인</a:t>
-            </a:r>
-          </a:p>
-          <a:p>
-            <a:pPr lvl="1"/>
-            <a:r>
-              <a:t>엔진은 도보 환승을 보행 네트워크로 계산</a:t>
-            </a:r>
-          </a:p>
-          <a:p>
-            <a:pPr lvl="1"/>
-            <a:r>
-              <a:t>승하차 소요시간 반영, 환승 저항을 비용에 포함</a:t>
+              <a:t>환승 증가 시 통행시간은 증가</a:t>
             </a:r>
           </a:p>
           <a:p>
             <a:pPr/>
             <a:r>
-              <a:t>판단 기준: 5분 차이면 대체로 정확, 30분 차이면 구현 오류</a:t>
+              <a:t>환승 증가에도 요금은 거의 불변</a:t>
             </a:r>
           </a:p>
           <a:p>
             <a:pPr/>
             <a:r>
-              <a:t>파일럿 프로젝트 제출물에 이 대조표가 포함</a:t>
+              <a:t>이유: 통합요금은 횟수가 아니라 거리에만 반응</a:t>
             </a:r>
           </a:p>
         </p:txBody>
@@ -7291,12 +7314,12 @@
       <p:grpSpPr/>
       <p:sp>
         <p:nvSpPr>
-          <p:cNvPr id="2" name="Text Placeholder 1"/>
-          <p:cNvSpPr>
-            <a:spLocks noGrp="1"/>
-          </p:cNvSpPr>
-          <p:nvPr>
-            <p:ph type="body" idx="100"/>
+          <p:cNvPr id="2" name="Title 1"/>
+          <p:cNvSpPr>
+            <a:spLocks noGrp="1"/>
+          </p:cNvSpPr>
+          <p:nvPr>
+            <p:ph type="title" idx="100"/>
           </p:nvPr>
         </p:nvSpPr>
         <p:spPr/>
@@ -7305,19 +7328,19 @@
           <a:lstStyle/>
           <a:p>
             <a:r>
-              <a:t>06</a:t>
-            </a:r>
-          </a:p>
-        </p:txBody>
-      </p:sp>
-      <p:sp>
-        <p:nvSpPr>
-          <p:cNvPr id="3" name="Title 2"/>
-          <p:cNvSpPr>
-            <a:spLocks noGrp="1"/>
-          </p:cNvSpPr>
-          <p:nvPr>
-            <p:ph type="title" idx="101"/>
+              <a:t>5.2 실제 엔진과의 대조</a:t>
+            </a:r>
+          </a:p>
+        </p:txBody>
+      </p:sp>
+      <p:sp>
+        <p:nvSpPr>
+          <p:cNvPr id="3" name="Text Placeholder 2"/>
+          <p:cNvSpPr>
+            <a:spLocks noGrp="1"/>
+          </p:cNvSpPr>
+          <p:nvPr>
+            <p:ph type="body" idx="101"/>
           </p:nvPr>
         </p:nvSpPr>
         <p:spPr/>
@@ -7326,7 +7349,7 @@
           <a:lstStyle/>
           <a:p>
             <a:r>
-              <a:t>정리와 연습</a:t>
+              <a:t>5. 교재 7.6–7.7 환승·요금과 엔진 대조</a:t>
             </a:r>
           </a:p>
         </p:txBody>
@@ -7346,40 +7369,88 @@
           <a:bodyPr/>
           <a:lstStyle/>
           <a:p>
-            <a:pPr>
-              <a:spcAft>
-                <a:spcPts val="1000"/>
-              </a:spcAft>
-            </a:pPr>
-            <a:r>
-              <a:rPr>
+            <a:pPr/>
+            <a:r>
+              <a:t>서버가 있으면 우리 RAPTOR와 엔진 결과를 나란히 비교</a:t>
+            </a:r>
+          </a:p>
+          <a:p>
+            <a:pPr/>
+            <a:r>
+              <a:t>차이의 원인</a:t>
+            </a:r>
+          </a:p>
+          <a:p>
+            <a:pPr lvl="1"/>
+            <a:r>
+              <a:t>엔진은 도보 환승을 보행 네트워크로 계산</a:t>
+            </a:r>
+          </a:p>
+          <a:p>
+            <a:pPr lvl="1"/>
+            <a:r>
+              <a:t>승하차 소요시간 반영, 환승 저항을 비용에 포함</a:t>
+            </a:r>
+          </a:p>
+          <a:p>
+            <a:pPr/>
+            <a:r>
+              <a:t>판단 기준: 5분 차이면 대체로 정확, 30분 차이면 구현 오류</a:t>
+            </a:r>
+          </a:p>
+          <a:p>
+            <a:pPr/>
+            <a:r>
+              <a:t>파일럿 프로젝트 제출물에 이 대조표가 포함</a:t>
+            </a:r>
+          </a:p>
+        </p:txBody>
+      </p:sp>
+      <p:sp>
+        <p:nvSpPr>
+          <p:cNvPr id="25" name="Slide Number Placeholder 0"/>
+          <p:cNvSpPr>
+            <a:spLocks noGrp="1"/>
+          </p:cNvSpPr>
+          <p:nvPr>
+            <p:ph type="sldNum" sz="quarter" idx="4294967295"/>
+          </p:nvPr>
+        </p:nvSpPr>
+        <p:spPr>
+          <a:xfrm>
+            <a:off x="10591495" y="6355080"/>
+            <a:ext cx="914400" cy="274320"/>
+          </a:xfrm>
+          <a:prstGeom prst="rect">
+            <a:avLst/>
+          </a:prstGeom>
+          <a:extLst>
+            <a:ext uri="{C572A759-6A51-4108-AA02-DFA0A04FC94B}">
+              <ma14:wrappingTextBoxFlag xmlns:ma14="http://schemas.microsoft.com/office/mac/drawingml/2011/main" val="0"/>
+            </a:ext>
+          </a:extLst>
+        </p:spPr>
+        <p:txBody>
+          <a:bodyPr/>
+          <a:lstStyle>
+            <a:lvl1pPr>
+              <a:defRPr sz="1000">
                 <a:solidFill>
                   <a:srgbClr val="AFAFAF"/>
                 </a:solidFill>
-              </a:rPr>
-              <a:t>6.1  </a:t>
-            </a:r>
-            <a:r>
-              <a:t>오늘의 정리</a:t>
-            </a:r>
-          </a:p>
-          <a:p>
-            <a:pPr>
-              <a:spcAft>
-                <a:spcPts val="1000"/>
-              </a:spcAft>
-            </a:pPr>
-            <a:r>
-              <a:rPr>
-                <a:solidFill>
-                  <a:srgbClr val="AFAFAF"/>
-                </a:solidFill>
-              </a:rPr>
-              <a:t>6.2  </a:t>
-            </a:r>
-            <a:r>
-              <a:t>연습과 다음 장</a:t>
-            </a:r>
+                <a:latin typeface="Pretendard Medium"/>
+                <a:ea typeface="Pretendard Medium"/>
+                <a:cs typeface="Pretendard Medium"/>
+              </a:defRPr>
+            </a:lvl1pPr>
+          </a:lstStyle>
+          <a:p>
+            <a:pPr algn="r"/>
+            <a:fld id="{F7021451-1387-4CA6-816F-3879F97B5CBC}" type="slidenum">
+              <a:rPr b="0" lang="en-US"/>
+              <a:t>1004</a:t>
+            </a:fld>
+            <a:endParaRPr lang="en-US"/>
           </a:p>
         </p:txBody>
       </p:sp>
@@ -7551,7 +7622,7 @@
                           </a:solidFill>
                           <a:latin typeface="Pretendard Medium"/>
                         </a:rPr>
-                        <a:t>1.1 정하지 않고 넘어간 값들  ·  1.2 학습 목표</a:t>
+                        <a:t>1.1 정하지 않고 넘어간 값들  ·  1.2 학습 목표  ·  1.3 교재와 실습을 여는 곳</a:t>
                       </a:r>
                     </a:p>
                   </a:txBody>
@@ -8198,12 +8269,12 @@
       <p:grpSpPr/>
       <p:sp>
         <p:nvSpPr>
-          <p:cNvPr id="2" name="Title 1"/>
-          <p:cNvSpPr>
-            <a:spLocks noGrp="1"/>
-          </p:cNvSpPr>
-          <p:nvPr>
-            <p:ph type="title" idx="100"/>
+          <p:cNvPr id="2" name="Text Placeholder 1"/>
+          <p:cNvSpPr>
+            <a:spLocks noGrp="1"/>
+          </p:cNvSpPr>
+          <p:nvPr>
+            <p:ph type="body" idx="100"/>
           </p:nvPr>
         </p:nvSpPr>
         <p:spPr/>
@@ -8212,19 +8283,19 @@
           <a:lstStyle/>
           <a:p>
             <a:r>
-              <a:t>6.1 오늘의 정리</a:t>
-            </a:r>
-          </a:p>
-        </p:txBody>
-      </p:sp>
-      <p:sp>
-        <p:nvSpPr>
-          <p:cNvPr id="3" name="Text Placeholder 2"/>
-          <p:cNvSpPr>
-            <a:spLocks noGrp="1"/>
-          </p:cNvSpPr>
-          <p:nvPr>
-            <p:ph type="body" idx="101"/>
+              <a:t>06</a:t>
+            </a:r>
+          </a:p>
+        </p:txBody>
+      </p:sp>
+      <p:sp>
+        <p:nvSpPr>
+          <p:cNvPr id="3" name="Title 2"/>
+          <p:cNvSpPr>
+            <a:spLocks noGrp="1"/>
+          </p:cNvSpPr>
+          <p:nvPr>
+            <p:ph type="title" idx="101"/>
           </p:nvPr>
         </p:nvSpPr>
         <p:spPr/>
@@ -8233,7 +8304,7 @@
           <a:lstStyle/>
           <a:p>
             <a:r>
-              <a:t>6. 정리와 연습</a:t>
+              <a:t>정리와 연습</a:t>
             </a:r>
           </a:p>
         </p:txBody>
@@ -8253,76 +8324,40 @@
           <a:bodyPr/>
           <a:lstStyle/>
           <a:p>
-            <a:pPr/>
-            <a:r>
-              <a:t>하남에서는 환승 1회로 도달 정류장이 1,679개에서 4,152개로 증가</a:t>
-            </a:r>
-          </a:p>
-          <a:p>
-            <a:pPr/>
-            <a:r>
-              <a:t>도보 환승 거리 확대는 도달 정류장을 거의 늘리지 못하고 오류만 증가</a:t>
-            </a:r>
-          </a:p>
-          <a:p>
-            <a:pPr/>
-            <a:r>
-              <a:t>통합환승요금: 가장 비싼 기본요금 1회 + 10 km 초과분 5 km당 100원</a:t>
-            </a:r>
-          </a:p>
-          <a:p>
-            <a:pPr/>
-            <a:r>
-              <a:t>통행시간의 27.5%가 도보와 대기 — 배차 개선의 여지</a:t>
-            </a:r>
-          </a:p>
-        </p:txBody>
-      </p:sp>
-      <p:sp>
-        <p:nvSpPr>
-          <p:cNvPr id="25" name="Slide Number Placeholder 0"/>
-          <p:cNvSpPr>
-            <a:spLocks noGrp="1"/>
-          </p:cNvSpPr>
-          <p:nvPr>
-            <p:ph type="sldNum" sz="quarter" idx="4294967295"/>
-          </p:nvPr>
-        </p:nvSpPr>
-        <p:spPr>
-          <a:xfrm>
-            <a:off x="10591495" y="6355080"/>
-            <a:ext cx="914400" cy="274320"/>
-          </a:xfrm>
-          <a:prstGeom prst="rect">
-            <a:avLst/>
-          </a:prstGeom>
-          <a:extLst>
-            <a:ext uri="{C572A759-6A51-4108-AA02-DFA0A04FC94B}">
-              <ma14:wrappingTextBoxFlag xmlns:ma14="http://schemas.microsoft.com/office/mac/drawingml/2011/main" val="0"/>
-            </a:ext>
-          </a:extLst>
-        </p:spPr>
-        <p:txBody>
-          <a:bodyPr/>
-          <a:lstStyle>
-            <a:lvl1pPr>
-              <a:defRPr sz="1000">
+            <a:pPr>
+              <a:spcAft>
+                <a:spcPts val="1000"/>
+              </a:spcAft>
+            </a:pPr>
+            <a:r>
+              <a:rPr>
                 <a:solidFill>
                   <a:srgbClr val="AFAFAF"/>
                 </a:solidFill>
-                <a:latin typeface="Pretendard Medium"/>
-                <a:ea typeface="Pretendard Medium"/>
-                <a:cs typeface="Pretendard Medium"/>
-              </a:defRPr>
-            </a:lvl1pPr>
-          </a:lstStyle>
-          <a:p>
-            <a:pPr algn="r"/>
-            <a:fld id="{F7021451-1387-4CA6-816F-3879F97B5CBC}" type="slidenum">
-              <a:rPr b="0" lang="en-US"/>
-              <a:t>1004</a:t>
-            </a:fld>
-            <a:endParaRPr lang="en-US"/>
+              </a:rPr>
+              <a:t>6.1  </a:t>
+            </a:r>
+            <a:r>
+              <a:t>오늘의 정리</a:t>
+            </a:r>
+          </a:p>
+          <a:p>
+            <a:pPr>
+              <a:spcAft>
+                <a:spcPts val="1000"/>
+              </a:spcAft>
+            </a:pPr>
+            <a:r>
+              <a:rPr>
+                <a:solidFill>
+                  <a:srgbClr val="AFAFAF"/>
+                </a:solidFill>
+              </a:rPr>
+              <a:t>6.2  </a:t>
+            </a:r>
+            <a:r>
+              <a:t>연습과 다음 장</a:t>
+            </a:r>
           </a:p>
         </p:txBody>
       </p:sp>
@@ -8360,7 +8395,7 @@
           <a:lstStyle/>
           <a:p>
             <a:r>
-              <a:t>6.2 연습과 다음 장</a:t>
+              <a:t>6.1 오늘의 정리</a:t>
             </a:r>
           </a:p>
         </p:txBody>
@@ -8403,37 +8438,25 @@
           <a:p>
             <a:pPr/>
             <a:r>
-              <a:t>연습 7.1 ★ — 세 가지 통행의 요금 계산과 손 검산</a:t>
-            </a:r>
-          </a:p>
-          <a:p>
-            <a:pPr lvl="1"/>
-            <a:r>
-              <a:t>산출물: 각 요금과 계산 과정</a:t>
+              <a:t>하남에서는 환승 1회로 도달 정류장이 1,679개에서 4,152개로 증가</a:t>
             </a:r>
           </a:p>
           <a:p>
             <a:pPr/>
             <a:r>
-              <a:t>연습 7.2 ★★ — 출발지를 미사역으로 변경한 300개 표본 비교</a:t>
-            </a:r>
-          </a:p>
-          <a:p>
-            <a:pPr lvl="1"/>
-            <a:r>
-              <a:t>산출물: 두 출발지의 지표 비교표, 원인 설명 4~5줄</a:t>
+              <a:t>도보 환승 거리 확대는 도달 정류장을 거의 늘리지 못하고 오류만 증가</a:t>
             </a:r>
           </a:p>
           <a:p>
             <a:pPr/>
             <a:r>
-              <a:t>연습 7.3 ★★★ — 30분 환승 제한 규칙 구현</a:t>
+              <a:t>통합환승요금: 가장 비싼 기본요금 1회 + 10 km 초과분 5 km당 100원</a:t>
             </a:r>
           </a:p>
           <a:p>
             <a:pPr/>
             <a:r>
-              <a:t>다음 장: 8장 통행 수요 생성</a:t>
+              <a:t>통행시간의 27.5%가 도보와 대기 — 배차 개선의 여지</a:t>
             </a:r>
           </a:p>
         </p:txBody>
@@ -8520,6 +8543,166 @@
           <a:lstStyle/>
           <a:p>
             <a:r>
+              <a:t>6.2 연습과 다음 장</a:t>
+            </a:r>
+          </a:p>
+        </p:txBody>
+      </p:sp>
+      <p:sp>
+        <p:nvSpPr>
+          <p:cNvPr id="3" name="Text Placeholder 2"/>
+          <p:cNvSpPr>
+            <a:spLocks noGrp="1"/>
+          </p:cNvSpPr>
+          <p:nvPr>
+            <p:ph type="body" idx="101"/>
+          </p:nvPr>
+        </p:nvSpPr>
+        <p:spPr/>
+        <p:txBody>
+          <a:bodyPr/>
+          <a:lstStyle/>
+          <a:p>
+            <a:r>
+              <a:t>6. 정리와 연습</a:t>
+            </a:r>
+          </a:p>
+        </p:txBody>
+      </p:sp>
+      <p:sp>
+        <p:nvSpPr>
+          <p:cNvPr id="4" name="Text Placeholder 3"/>
+          <p:cNvSpPr>
+            <a:spLocks noGrp="1"/>
+          </p:cNvSpPr>
+          <p:nvPr>
+            <p:ph type="body" idx="102"/>
+          </p:nvPr>
+        </p:nvSpPr>
+        <p:spPr/>
+        <p:txBody>
+          <a:bodyPr/>
+          <a:lstStyle/>
+          <a:p>
+            <a:pPr/>
+            <a:r>
+              <a:t>연습 7.1 ★ — 세 가지 통행의 요금 계산과 손 검산</a:t>
+            </a:r>
+          </a:p>
+          <a:p>
+            <a:pPr lvl="1"/>
+            <a:r>
+              <a:t>산출물: 각 요금과 계산 과정</a:t>
+            </a:r>
+          </a:p>
+          <a:p>
+            <a:pPr/>
+            <a:r>
+              <a:t>연습 7.2 ★★ — 출발지를 미사역으로 변경한 300개 표본 비교</a:t>
+            </a:r>
+          </a:p>
+          <a:p>
+            <a:pPr lvl="1"/>
+            <a:r>
+              <a:t>산출물: 두 출발지의 지표 비교표, 원인 설명 4~5줄</a:t>
+            </a:r>
+          </a:p>
+          <a:p>
+            <a:pPr/>
+            <a:r>
+              <a:t>연습 7.3 ★★★ — 30분 환승 제한 규칙 구현</a:t>
+            </a:r>
+          </a:p>
+          <a:p>
+            <a:pPr/>
+            <a:r>
+              <a:t>다음 장: 8장 통행 수요 생성</a:t>
+            </a:r>
+          </a:p>
+        </p:txBody>
+      </p:sp>
+      <p:sp>
+        <p:nvSpPr>
+          <p:cNvPr id="25" name="Slide Number Placeholder 0"/>
+          <p:cNvSpPr>
+            <a:spLocks noGrp="1"/>
+          </p:cNvSpPr>
+          <p:nvPr>
+            <p:ph type="sldNum" sz="quarter" idx="4294967295"/>
+          </p:nvPr>
+        </p:nvSpPr>
+        <p:spPr>
+          <a:xfrm>
+            <a:off x="10591495" y="6355080"/>
+            <a:ext cx="914400" cy="274320"/>
+          </a:xfrm>
+          <a:prstGeom prst="rect">
+            <a:avLst/>
+          </a:prstGeom>
+          <a:extLst>
+            <a:ext uri="{C572A759-6A51-4108-AA02-DFA0A04FC94B}">
+              <ma14:wrappingTextBoxFlag xmlns:ma14="http://schemas.microsoft.com/office/mac/drawingml/2011/main" val="0"/>
+            </a:ext>
+          </a:extLst>
+        </p:spPr>
+        <p:txBody>
+          <a:bodyPr/>
+          <a:lstStyle>
+            <a:lvl1pPr>
+              <a:defRPr sz="1000">
+                <a:solidFill>
+                  <a:srgbClr val="AFAFAF"/>
+                </a:solidFill>
+                <a:latin typeface="Pretendard Medium"/>
+                <a:ea typeface="Pretendard Medium"/>
+                <a:cs typeface="Pretendard Medium"/>
+              </a:defRPr>
+            </a:lvl1pPr>
+          </a:lstStyle>
+          <a:p>
+            <a:pPr algn="r"/>
+            <a:fld id="{F7021451-1387-4CA6-816F-3879F97B5CBC}" type="slidenum">
+              <a:rPr b="0" lang="en-US"/>
+              <a:t>1004</a:t>
+            </a:fld>
+            <a:endParaRPr lang="en-US"/>
+          </a:p>
+        </p:txBody>
+      </p:sp>
+    </p:spTree>
+  </p:cSld>
+  <p:clrMapOvr>
+    <a:masterClrMapping/>
+  </p:clrMapOvr>
+</p:sld>
+</file>
+
+<file path=ppt/slides/slide23.xml><?xml version="1.0" encoding="utf-8"?>
+<p:sld xmlns:a="http://schemas.openxmlformats.org/drawingml/2006/main" xmlns:p="http://schemas.openxmlformats.org/presentationml/2006/main" xmlns:r="http://schemas.openxmlformats.org/officeDocument/2006/relationships">
+  <p:cSld>
+    <p:spTree>
+      <p:nvGrpSpPr>
+        <p:cNvPr id="1" name=""/>
+        <p:cNvGrpSpPr/>
+        <p:nvPr/>
+      </p:nvGrpSpPr>
+      <p:grpSpPr/>
+      <p:sp>
+        <p:nvSpPr>
+          <p:cNvPr id="2" name="Title 1"/>
+          <p:cNvSpPr>
+            <a:spLocks noGrp="1"/>
+          </p:cNvSpPr>
+          <p:nvPr>
+            <p:ph type="title" idx="100"/>
+          </p:nvPr>
+        </p:nvSpPr>
+        <p:spPr/>
+        <p:txBody>
+          <a:bodyPr/>
+          <a:lstStyle/>
+          <a:p>
+            <a:r>
               <a:t>다음 주에 봅니다</a:t>
             </a:r>
           </a:p>
@@ -8677,6 +8860,24 @@
               <a:t>학습 목표</a:t>
             </a:r>
           </a:p>
+          <a:p>
+            <a:pPr>
+              <a:spcAft>
+                <a:spcPts val="1000"/>
+              </a:spcAft>
+            </a:pPr>
+            <a:r>
+              <a:rPr>
+                <a:solidFill>
+                  <a:srgbClr val="AFAFAF"/>
+                </a:solidFill>
+              </a:rPr>
+              <a:t>1.3  </a:t>
+            </a:r>
+            <a:r>
+              <a:t>교재와 실습을 여는 곳</a:t>
+            </a:r>
+          </a:p>
         </p:txBody>
       </p:sp>
     </p:spTree>
@@ -9007,12 +9208,12 @@
       <p:grpSpPr/>
       <p:sp>
         <p:nvSpPr>
-          <p:cNvPr id="2" name="Text Placeholder 1"/>
-          <p:cNvSpPr>
-            <a:spLocks noGrp="1"/>
-          </p:cNvSpPr>
-          <p:nvPr>
-            <p:ph type="body" idx="100"/>
+          <p:cNvPr id="2" name="Title 1"/>
+          <p:cNvSpPr>
+            <a:spLocks noGrp="1"/>
+          </p:cNvSpPr>
+          <p:nvPr>
+            <p:ph type="title" idx="100"/>
           </p:nvPr>
         </p:nvSpPr>
         <p:spPr/>
@@ -9021,19 +9222,19 @@
           <a:lstStyle/>
           <a:p>
             <a:r>
-              <a:t>02</a:t>
-            </a:r>
-          </a:p>
-        </p:txBody>
-      </p:sp>
-      <p:sp>
-        <p:nvSpPr>
-          <p:cNvPr id="3" name="Title 2"/>
-          <p:cNvSpPr>
-            <a:spLocks noGrp="1"/>
-          </p:cNvSpPr>
-          <p:nvPr>
-            <p:ph type="title" idx="101"/>
+              <a:t>1.3 교재와 실습을 여는 곳</a:t>
+            </a:r>
+          </a:p>
+        </p:txBody>
+      </p:sp>
+      <p:sp>
+        <p:nvSpPr>
+          <p:cNvPr id="3" name="Text Placeholder 2"/>
+          <p:cNvSpPr>
+            <a:spLocks noGrp="1"/>
+          </p:cNvSpPr>
+          <p:nvPr>
+            <p:ph type="body" idx="101"/>
           </p:nvPr>
         </p:nvSpPr>
         <p:spPr/>
@@ -9042,7 +9243,7 @@
           <a:lstStyle/>
           <a:p>
             <a:r>
-              <a:t>교재 7.1–7.2 환승 파라미터</a:t>
+              <a:t>1. 도입과 학습 목표</a:t>
             </a:r>
           </a:p>
         </p:txBody>
@@ -9062,40 +9263,335 @@
           <a:bodyPr/>
           <a:lstStyle/>
           <a:p>
-            <a:pPr>
-              <a:spcAft>
-                <a:spcPts val="1000"/>
-              </a:spcAft>
-            </a:pPr>
-            <a:r>
-              <a:rPr>
+            <a:pPr/>
+            <a:r>
+              <a:t>저장소: github.com/jihoyeo/mobility-simulation-book — blob/main 아래 경로</a:t>
+            </a:r>
+          </a:p>
+          <a:p>
+            <a:pPr/>
+            <a:r>
+              <a:t>노트북 실행: jupyter lab labs/ch07_raptor_fare.ipynb</a:t>
+            </a:r>
+          </a:p>
+          <a:p>
+            <a:pPr/>
+            <a:r>
+              <a:t>진행 순서: 슬라이드 개요 → 교재 본문 → 실습 노트북</a:t>
+            </a:r>
+          </a:p>
+        </p:txBody>
+      </p:sp>
+      <p:sp>
+        <p:nvSpPr>
+          <p:cNvPr id="5" name="Text Placeholder 4"/>
+          <p:cNvSpPr>
+            <a:spLocks noGrp="1"/>
+          </p:cNvSpPr>
+          <p:nvPr>
+            <p:ph type="body" idx="103"/>
+          </p:nvPr>
+        </p:nvSpPr>
+        <p:spPr/>
+        <p:txBody>
+          <a:bodyPr/>
+          <a:lstStyle/>
+          <a:p>
+            <a:r>
+              <a:t>표 1. 오늘 여는 파일과 경로</a:t>
+            </a:r>
+          </a:p>
+        </p:txBody>
+      </p:sp>
+      <p:graphicFrame>
+        <p:nvGraphicFramePr>
+          <p:cNvPr id="6" name="Table Placeholder 5"/>
+          <p:cNvGraphicFramePr>
+            <a:graphicFrameLocks noGrp="1"/>
+          </p:cNvGraphicFramePr>
+          <p:nvPr>
+            <p:ph type="tbl" idx="104"/>
+          </p:nvPr>
+        </p:nvGraphicFramePr>
+        <p:xfrm>
+          <a:off x="4937760" y="1828800"/>
+          <a:ext cx="6565392" cy="1676400"/>
+        </p:xfrm>
+        <a:graphic>
+          <a:graphicData uri="http://schemas.openxmlformats.org/drawingml/2006/table">
+            <a:tbl>
+              <a:tblPr firstRow="0" bandRow="0" firstCol="0" lastRow="0" lastCol="0" bandCol="0"/>
+              <a:tblGrid>
+                <a:gridCol w="3282696"/>
+                <a:gridCol w="3282696"/>
+              </a:tblGrid>
+              <a:tr h="406400">
+                <a:tc>
+                  <a:txBody>
+                    <a:bodyPr/>
+                    <a:lstStyle/>
+                    <a:p>
+                      <a:r>
+                        <a:rPr sz="1300" b="0">
+                          <a:solidFill>
+                            <a:srgbClr val="FFFFFF"/>
+                          </a:solidFill>
+                          <a:latin typeface="Pretendard Medium"/>
+                        </a:rPr>
+                        <a:t>자료</a:t>
+                      </a:r>
+                    </a:p>
+                  </a:txBody>
+                  <a:tcPr marL="101600" marR="101600" marT="76200" marB="76200" anchor="ctr">
+                    <a:solidFill>
+                      <a:srgbClr val="000000"/>
+                    </a:solidFill>
+                    <a:lnL w="0">
+                      <a:noFill/>
+                    </a:lnL>
+                    <a:lnR w="0">
+                      <a:noFill/>
+                    </a:lnR>
+                    <a:lnT w="0">
+                      <a:noFill/>
+                    </a:lnT>
+                    <a:lnB w="0">
+                      <a:noFill/>
+                    </a:lnB>
+                  </a:tcPr>
+                </a:tc>
+                <a:tc>
+                  <a:txBody>
+                    <a:bodyPr/>
+                    <a:lstStyle/>
+                    <a:p>
+                      <a:r>
+                        <a:rPr sz="1300" b="0">
+                          <a:solidFill>
+                            <a:srgbClr val="FFFFFF"/>
+                          </a:solidFill>
+                          <a:latin typeface="Pretendard Medium"/>
+                        </a:rPr>
+                        <a:t>경로</a:t>
+                      </a:r>
+                    </a:p>
+                  </a:txBody>
+                  <a:tcPr marL="101600" marR="101600" marT="76200" marB="76200" anchor="ctr">
+                    <a:solidFill>
+                      <a:srgbClr val="000000"/>
+                    </a:solidFill>
+                    <a:lnL w="0">
+                      <a:noFill/>
+                    </a:lnL>
+                    <a:lnR w="0">
+                      <a:noFill/>
+                    </a:lnR>
+                    <a:lnT w="0">
+                      <a:noFill/>
+                    </a:lnT>
+                    <a:lnB w="0">
+                      <a:noFill/>
+                    </a:lnB>
+                  </a:tcPr>
+                </a:tc>
+              </a:tr>
+              <a:tr h="635000">
+                <a:tc>
+                  <a:txBody>
+                    <a:bodyPr/>
+                    <a:lstStyle/>
+                    <a:p>
+                      <a:r>
+                        <a:rPr sz="1300" b="1">
+                          <a:solidFill>
+                            <a:srgbClr val="000000"/>
+                          </a:solidFill>
+                          <a:latin typeface="Pretendard"/>
+                        </a:rPr>
+                        <a:t>교재 원고</a:t>
+                      </a:r>
+                    </a:p>
+                  </a:txBody>
+                  <a:tcPr marL="101600" marR="101600" marT="101600" marB="101600" anchor="ctr">
+                    <a:solidFill>
+                      <a:srgbClr val="FFFFFF"/>
+                    </a:solidFill>
+                    <a:lnL w="0">
+                      <a:noFill/>
+                    </a:lnL>
+                    <a:lnR w="0">
+                      <a:noFill/>
+                    </a:lnR>
+                    <a:lnT w="0">
+                      <a:noFill/>
+                    </a:lnT>
+                    <a:lnB w="9525">
+                      <a:solidFill>
+                        <a:srgbClr val="E2E2E2"/>
+                      </a:solidFill>
+                    </a:lnB>
+                  </a:tcPr>
+                </a:tc>
+                <a:tc>
+                  <a:txBody>
+                    <a:bodyPr/>
+                    <a:lstStyle/>
+                    <a:p>
+                      <a:r>
+                        <a:rPr sz="1300" b="0">
+                          <a:solidFill>
+                            <a:srgbClr val="5E5E5E"/>
+                          </a:solidFill>
+                          <a:latin typeface="Pretendard Medium"/>
+                        </a:rPr>
+                        <a:t>ko/ch07_raptor_fare.md</a:t>
+                      </a:r>
+                    </a:p>
+                  </a:txBody>
+                  <a:tcPr marL="101600" marR="101600" marT="101600" marB="101600" anchor="ctr">
+                    <a:solidFill>
+                      <a:srgbClr val="FFFFFF"/>
+                    </a:solidFill>
+                    <a:lnL w="0">
+                      <a:noFill/>
+                    </a:lnL>
+                    <a:lnR w="0">
+                      <a:noFill/>
+                    </a:lnR>
+                    <a:lnT w="0">
+                      <a:noFill/>
+                    </a:lnT>
+                    <a:lnB w="9525">
+                      <a:solidFill>
+                        <a:srgbClr val="E2E2E2"/>
+                      </a:solidFill>
+                    </a:lnB>
+                  </a:tcPr>
+                </a:tc>
+              </a:tr>
+              <a:tr h="635000">
+                <a:tc>
+                  <a:txBody>
+                    <a:bodyPr/>
+                    <a:lstStyle/>
+                    <a:p>
+                      <a:r>
+                        <a:rPr sz="1300" b="1">
+                          <a:solidFill>
+                            <a:srgbClr val="000000"/>
+                          </a:solidFill>
+                          <a:latin typeface="Pretendard"/>
+                        </a:rPr>
+                        <a:t>실습 노트북</a:t>
+                      </a:r>
+                    </a:p>
+                  </a:txBody>
+                  <a:tcPr marL="101600" marR="101600" marT="101600" marB="101600" anchor="ctr">
+                    <a:solidFill>
+                      <a:srgbClr val="FFFFFF"/>
+                    </a:solidFill>
+                    <a:lnL w="0">
+                      <a:noFill/>
+                    </a:lnL>
+                    <a:lnR w="0">
+                      <a:noFill/>
+                    </a:lnR>
+                    <a:lnT w="0">
+                      <a:noFill/>
+                    </a:lnT>
+                    <a:lnB w="9525">
+                      <a:solidFill>
+                        <a:srgbClr val="E2E2E2"/>
+                      </a:solidFill>
+                    </a:lnB>
+                  </a:tcPr>
+                </a:tc>
+                <a:tc>
+                  <a:txBody>
+                    <a:bodyPr/>
+                    <a:lstStyle/>
+                    <a:p>
+                      <a:r>
+                        <a:rPr sz="1300" b="0">
+                          <a:solidFill>
+                            <a:srgbClr val="5E5E5E"/>
+                          </a:solidFill>
+                          <a:latin typeface="Pretendard Medium"/>
+                        </a:rPr>
+                        <a:t>labs/ch07_raptor_fare.ipynb</a:t>
+                      </a:r>
+                    </a:p>
+                  </a:txBody>
+                  <a:tcPr marL="101600" marR="101600" marT="101600" marB="101600" anchor="ctr">
+                    <a:solidFill>
+                      <a:srgbClr val="FFFFFF"/>
+                    </a:solidFill>
+                    <a:lnL w="0">
+                      <a:noFill/>
+                    </a:lnL>
+                    <a:lnR w="0">
+                      <a:noFill/>
+                    </a:lnR>
+                    <a:lnT w="0">
+                      <a:noFill/>
+                    </a:lnT>
+                    <a:lnB w="9525">
+                      <a:solidFill>
+                        <a:srgbClr val="E2E2E2"/>
+                      </a:solidFill>
+                    </a:lnB>
+                  </a:tcPr>
+                </a:tc>
+              </a:tr>
+            </a:tbl>
+          </a:graphicData>
+        </a:graphic>
+      </p:graphicFrame>
+      <p:sp>
+        <p:nvSpPr>
+          <p:cNvPr id="25" name="Slide Number Placeholder 0"/>
+          <p:cNvSpPr>
+            <a:spLocks noGrp="1"/>
+          </p:cNvSpPr>
+          <p:nvPr>
+            <p:ph type="sldNum" sz="quarter" idx="4294967295"/>
+          </p:nvPr>
+        </p:nvSpPr>
+        <p:spPr>
+          <a:xfrm>
+            <a:off x="10591495" y="6355080"/>
+            <a:ext cx="914400" cy="274320"/>
+          </a:xfrm>
+          <a:prstGeom prst="rect">
+            <a:avLst/>
+          </a:prstGeom>
+          <a:extLst>
+            <a:ext uri="{C572A759-6A51-4108-AA02-DFA0A04FC94B}">
+              <ma14:wrappingTextBoxFlag xmlns:ma14="http://schemas.microsoft.com/office/mac/drawingml/2011/main" val="0"/>
+            </a:ext>
+          </a:extLst>
+        </p:spPr>
+        <p:txBody>
+          <a:bodyPr/>
+          <a:lstStyle>
+            <a:lvl1pPr>
+              <a:defRPr sz="1000">
                 <a:solidFill>
                   <a:srgbClr val="AFAFAF"/>
                 </a:solidFill>
-              </a:rPr>
-              <a:t>2.1  </a:t>
-            </a:r>
-            <a:r>
-              <a:t>환승 허용 횟수</a:t>
-            </a:r>
-          </a:p>
-          <a:p>
-            <a:pPr>
-              <a:spcAft>
-                <a:spcPts val="1000"/>
-              </a:spcAft>
-            </a:pPr>
-            <a:r>
-              <a:rPr>
-                <a:solidFill>
-                  <a:srgbClr val="AFAFAF"/>
-                </a:solidFill>
-              </a:rPr>
-              <a:t>2.2  </a:t>
-            </a:r>
-            <a:r>
-              <a:t>도보 환승 허용 거리</a:t>
-            </a:r>
+                <a:latin typeface="Pretendard Medium"/>
+                <a:ea typeface="Pretendard Medium"/>
+                <a:cs typeface="Pretendard Medium"/>
+              </a:defRPr>
+            </a:lvl1pPr>
+          </a:lstStyle>
+          <a:p>
+            <a:pPr algn="r"/>
+            <a:fld id="{F7021451-1387-4CA6-816F-3879F97B5CBC}" type="slidenum">
+              <a:rPr b="0" lang="en-US"/>
+              <a:t>1008</a:t>
+            </a:fld>
+            <a:endParaRPr lang="en-US"/>
           </a:p>
         </p:txBody>
       </p:sp>
@@ -9119,6 +9615,118 @@
       <p:grpSpPr/>
       <p:sp>
         <p:nvSpPr>
+          <p:cNvPr id="2" name="Text Placeholder 1"/>
+          <p:cNvSpPr>
+            <a:spLocks noGrp="1"/>
+          </p:cNvSpPr>
+          <p:nvPr>
+            <p:ph type="body" idx="100"/>
+          </p:nvPr>
+        </p:nvSpPr>
+        <p:spPr/>
+        <p:txBody>
+          <a:bodyPr/>
+          <a:lstStyle/>
+          <a:p>
+            <a:r>
+              <a:t>02</a:t>
+            </a:r>
+          </a:p>
+        </p:txBody>
+      </p:sp>
+      <p:sp>
+        <p:nvSpPr>
+          <p:cNvPr id="3" name="Title 2"/>
+          <p:cNvSpPr>
+            <a:spLocks noGrp="1"/>
+          </p:cNvSpPr>
+          <p:nvPr>
+            <p:ph type="title" idx="101"/>
+          </p:nvPr>
+        </p:nvSpPr>
+        <p:spPr/>
+        <p:txBody>
+          <a:bodyPr/>
+          <a:lstStyle/>
+          <a:p>
+            <a:r>
+              <a:t>교재 7.1–7.2 환승 파라미터</a:t>
+            </a:r>
+          </a:p>
+        </p:txBody>
+      </p:sp>
+      <p:sp>
+        <p:nvSpPr>
+          <p:cNvPr id="4" name="Text Placeholder 3"/>
+          <p:cNvSpPr>
+            <a:spLocks noGrp="1"/>
+          </p:cNvSpPr>
+          <p:nvPr>
+            <p:ph type="body" idx="102"/>
+          </p:nvPr>
+        </p:nvSpPr>
+        <p:spPr/>
+        <p:txBody>
+          <a:bodyPr/>
+          <a:lstStyle/>
+          <a:p>
+            <a:pPr>
+              <a:spcAft>
+                <a:spcPts val="1000"/>
+              </a:spcAft>
+            </a:pPr>
+            <a:r>
+              <a:rPr>
+                <a:solidFill>
+                  <a:srgbClr val="AFAFAF"/>
+                </a:solidFill>
+              </a:rPr>
+              <a:t>2.1  </a:t>
+            </a:r>
+            <a:r>
+              <a:t>환승 허용 횟수</a:t>
+            </a:r>
+          </a:p>
+          <a:p>
+            <a:pPr>
+              <a:spcAft>
+                <a:spcPts val="1000"/>
+              </a:spcAft>
+            </a:pPr>
+            <a:r>
+              <a:rPr>
+                <a:solidFill>
+                  <a:srgbClr val="AFAFAF"/>
+                </a:solidFill>
+              </a:rPr>
+              <a:t>2.2  </a:t>
+            </a:r>
+            <a:r>
+              <a:t>도보 환승 허용 거리</a:t>
+            </a:r>
+          </a:p>
+        </p:txBody>
+      </p:sp>
+    </p:spTree>
+  </p:cSld>
+  <p:clrMapOvr>
+    <a:masterClrMapping/>
+  </p:clrMapOvr>
+</p:sld>
+</file>
+
+<file path=ppt/slides/slide8.xml><?xml version="1.0" encoding="utf-8"?>
+<p:sld xmlns:a="http://schemas.openxmlformats.org/drawingml/2006/main" xmlns:p="http://schemas.openxmlformats.org/presentationml/2006/main" xmlns:r="http://schemas.openxmlformats.org/officeDocument/2006/relationships">
+  <p:cSld>
+    <p:spTree>
+      <p:nvGrpSpPr>
+        <p:cNvPr id="1" name=""/>
+        <p:cNvGrpSpPr/>
+        <p:nvPr/>
+      </p:nvGrpSpPr>
+      <p:grpSpPr/>
+      <p:sp>
+        <p:nvSpPr>
           <p:cNvPr id="2" name="Title 1"/>
           <p:cNvSpPr>
             <a:spLocks noGrp="1"/>
@@ -9209,7 +9817,7 @@
           <a:lstStyle/>
           <a:p>
             <a:r>
-              <a:t>표 1. 환승 허용 횟수별 도달 정류장 수 (하남시청 오전 8시 출발)</a:t>
+              <a:t>표 2. 환승 허용 횟수별 도달 정류장 수 (하남시청 오전 8시 출발)</a:t>
             </a:r>
           </a:p>
         </p:txBody>
@@ -9588,7 +10196,7 @@
 </p:sld>
 </file>
 
-<file path=ppt/slides/slide8.xml><?xml version="1.0" encoding="utf-8"?>
+<file path=ppt/slides/slide9.xml><?xml version="1.0" encoding="utf-8"?>
 <p:sld xmlns:a="http://schemas.openxmlformats.org/drawingml/2006/main" xmlns:p="http://schemas.openxmlformats.org/presentationml/2006/main" xmlns:r="http://schemas.openxmlformats.org/officeDocument/2006/relationships">
   <p:cSld>
     <p:spTree>
@@ -9725,118 +10333,6 @@
               <a:t>1004</a:t>
             </a:fld>
             <a:endParaRPr lang="en-US"/>
-          </a:p>
-        </p:txBody>
-      </p:sp>
-    </p:spTree>
-  </p:cSld>
-  <p:clrMapOvr>
-    <a:masterClrMapping/>
-  </p:clrMapOvr>
-</p:sld>
-</file>
-
-<file path=ppt/slides/slide9.xml><?xml version="1.0" encoding="utf-8"?>
-<p:sld xmlns:a="http://schemas.openxmlformats.org/drawingml/2006/main" xmlns:p="http://schemas.openxmlformats.org/presentationml/2006/main" xmlns:r="http://schemas.openxmlformats.org/officeDocument/2006/relationships">
-  <p:cSld>
-    <p:spTree>
-      <p:nvGrpSpPr>
-        <p:cNvPr id="1" name=""/>
-        <p:cNvGrpSpPr/>
-        <p:nvPr/>
-      </p:nvGrpSpPr>
-      <p:grpSpPr/>
-      <p:sp>
-        <p:nvSpPr>
-          <p:cNvPr id="2" name="Text Placeholder 1"/>
-          <p:cNvSpPr>
-            <a:spLocks noGrp="1"/>
-          </p:cNvSpPr>
-          <p:nvPr>
-            <p:ph type="body" idx="100"/>
-          </p:nvPr>
-        </p:nvSpPr>
-        <p:spPr/>
-        <p:txBody>
-          <a:bodyPr/>
-          <a:lstStyle/>
-          <a:p>
-            <a:r>
-              <a:t>03</a:t>
-            </a:r>
-          </a:p>
-        </p:txBody>
-      </p:sp>
-      <p:sp>
-        <p:nvSpPr>
-          <p:cNvPr id="3" name="Title 2"/>
-          <p:cNvSpPr>
-            <a:spLocks noGrp="1"/>
-          </p:cNvSpPr>
-          <p:nvPr>
-            <p:ph type="title" idx="101"/>
-          </p:nvPr>
-        </p:nvSpPr>
-        <p:spPr/>
-        <p:txBody>
-          <a:bodyPr/>
-          <a:lstStyle/>
-          <a:p>
-            <a:r>
-              <a:t>교재 7.3 통합환승요금</a:t>
-            </a:r>
-          </a:p>
-        </p:txBody>
-      </p:sp>
-      <p:sp>
-        <p:nvSpPr>
-          <p:cNvPr id="4" name="Text Placeholder 3"/>
-          <p:cNvSpPr>
-            <a:spLocks noGrp="1"/>
-          </p:cNvSpPr>
-          <p:nvPr>
-            <p:ph type="body" idx="102"/>
-          </p:nvPr>
-        </p:nvSpPr>
-        <p:spPr/>
-        <p:txBody>
-          <a:bodyPr/>
-          <a:lstStyle/>
-          <a:p>
-            <a:pPr>
-              <a:spcAft>
-                <a:spcPts val="1000"/>
-              </a:spcAft>
-            </a:pPr>
-            <a:r>
-              <a:rPr>
-                <a:solidFill>
-                  <a:srgbClr val="AFAFAF"/>
-                </a:solidFill>
-              </a:rPr>
-              <a:t>3.1  </a:t>
-            </a:r>
-            <a:r>
-              <a:t>세 줄 규칙</a:t>
-            </a:r>
-          </a:p>
-          <a:p>
-            <a:pPr>
-              <a:spcAft>
-                <a:spcPts val="1000"/>
-              </a:spcAft>
-            </a:pPr>
-            <a:r>
-              <a:rPr>
-                <a:solidFill>
-                  <a:srgbClr val="AFAFAF"/>
-                </a:solidFill>
-              </a:rPr>
-              <a:t>3.2  </a:t>
-            </a:r>
-            <a:r>
-              <a:t>손 검산</a:t>
-            </a:r>
           </a:p>
         </p:txBody>
       </p:sp>
